--- a/tutorial/T09/tut09.pptx
+++ b/tutorial/T09/tut09.pptx
@@ -130,13 +130,60 @@
 <file path=ppt/revisionInfo.xml><?xml version="1.0" encoding="utf-8"?>
 <p1510:revInfo xmlns:a="http://schemas.openxmlformats.org/drawingml/2006/main" xmlns:r="http://schemas.openxmlformats.org/officeDocument/2006/relationships" xmlns:p1510="http://schemas.microsoft.com/office/powerpoint/2015/10/main">
   <p1510:revLst>
-    <p1510:client id="{4C8E25FF-694E-492B-A7BA-7579B8070BA3}" v="1" dt="2025-02-18T12:12:43.479"/>
+    <p1510:client id="{AF4EF938-52EB-4FAE-9B3C-E68038366E87}" v="3" dt="2025-03-18T15:44:42.440"/>
   </p1510:revLst>
 </p1510:revInfo>
 </file>
 
 <file path=ppt/changesInfos/changesInfo1.xml><?xml version="1.0" encoding="utf-8"?>
 <pc:chgInfo xmlns:a="http://schemas.openxmlformats.org/drawingml/2006/main" xmlns:r="http://schemas.openxmlformats.org/officeDocument/2006/relationships" xmlns:ac="http://schemas.microsoft.com/office/drawing/2013/main/command" xmlns:pc="http://schemas.microsoft.com/office/powerpoint/2013/main/command">
+  <pc:docChgLst>
+    <pc:chgData name="Shaofeng Wu" userId="16cc59afe9483dd5" providerId="LiveId" clId="{AF4EF938-52EB-4FAE-9B3C-E68038366E87}"/>
+    <pc:docChg chg="modSld">
+      <pc:chgData name="Shaofeng Wu" userId="16cc59afe9483dd5" providerId="LiveId" clId="{AF4EF938-52EB-4FAE-9B3C-E68038366E87}" dt="2025-03-18T15:45:22.513" v="9" actId="20577"/>
+      <pc:docMkLst>
+        <pc:docMk/>
+      </pc:docMkLst>
+      <pc:sldChg chg="addSp modSp mod">
+        <pc:chgData name="Shaofeng Wu" userId="16cc59afe9483dd5" providerId="LiveId" clId="{AF4EF938-52EB-4FAE-9B3C-E68038366E87}" dt="2025-03-18T15:45:05.645" v="7" actId="1076"/>
+        <pc:sldMkLst>
+          <pc:docMk/>
+          <pc:sldMk cId="267997120" sldId="287"/>
+        </pc:sldMkLst>
+        <pc:picChg chg="add mod">
+          <ac:chgData name="Shaofeng Wu" userId="16cc59afe9483dd5" providerId="LiveId" clId="{AF4EF938-52EB-4FAE-9B3C-E68038366E87}" dt="2025-03-18T15:45:05.645" v="7" actId="1076"/>
+          <ac:picMkLst>
+            <pc:docMk/>
+            <pc:sldMk cId="267997120" sldId="287"/>
+            <ac:picMk id="6" creationId="{253C3C66-D225-D617-4457-222DEBBBAEF1}"/>
+          </ac:picMkLst>
+        </pc:picChg>
+        <pc:picChg chg="add mod">
+          <ac:chgData name="Shaofeng Wu" userId="16cc59afe9483dd5" providerId="LiveId" clId="{AF4EF938-52EB-4FAE-9B3C-E68038366E87}" dt="2025-03-18T15:44:42.440" v="2" actId="1076"/>
+          <ac:picMkLst>
+            <pc:docMk/>
+            <pc:sldMk cId="267997120" sldId="287"/>
+            <ac:picMk id="1026" creationId="{4FF6D860-7D67-912E-563A-BDF1D4054485}"/>
+          </ac:picMkLst>
+        </pc:picChg>
+      </pc:sldChg>
+      <pc:sldChg chg="modSp mod">
+        <pc:chgData name="Shaofeng Wu" userId="16cc59afe9483dd5" providerId="LiveId" clId="{AF4EF938-52EB-4FAE-9B3C-E68038366E87}" dt="2025-03-18T15:45:22.513" v="9" actId="20577"/>
+        <pc:sldMkLst>
+          <pc:docMk/>
+          <pc:sldMk cId="1908193616" sldId="300"/>
+        </pc:sldMkLst>
+        <pc:spChg chg="mod">
+          <ac:chgData name="Shaofeng Wu" userId="16cc59afe9483dd5" providerId="LiveId" clId="{AF4EF938-52EB-4FAE-9B3C-E68038366E87}" dt="2025-03-18T15:45:22.513" v="9" actId="20577"/>
+          <ac:spMkLst>
+            <pc:docMk/>
+            <pc:sldMk cId="1908193616" sldId="300"/>
+            <ac:spMk id="37" creationId="{A758C430-D682-C646-8B66-4341DDBCEF6F}"/>
+          </ac:spMkLst>
+        </pc:spChg>
+      </pc:sldChg>
+    </pc:docChg>
+  </pc:docChgLst>
   <pc:docChgLst>
     <pc:chgData name="Qingyu Song" userId="O4NG2utMRSC9bShTQouuMd1Uq3x00QhxVtEheGSGOoU=" providerId="None" clId="Web-{1A9491C6-FD31-4FA7-98FA-39E25D0B6578}"/>
     <pc:docChg chg="modSld">
@@ -519,7 +566,7 @@
           <a:p>
             <a:fld id="{9265656F-E94E-4266-B808-01646AFF7213}" type="datetimeFigureOut">
               <a:rPr lang="en-US" smtClean="0"/>
-              <a:t>2/18/2025</a:t>
+              <a:t>3/18/2025</a:t>
             </a:fld>
             <a:endParaRPr lang="en-US"/>
           </a:p>
@@ -936,7 +983,7 @@
           <a:p>
             <a:fld id="{2425905D-C0C4-D040-B3F5-79CCA23FA4EB}" type="datetimeFigureOut">
               <a:rPr lang="en-US" smtClean="0"/>
-              <a:t>2/18/2025</a:t>
+              <a:t>3/18/2025</a:t>
             </a:fld>
             <a:endParaRPr lang="en-US"/>
           </a:p>
@@ -1136,7 +1183,7 @@
           <a:p>
             <a:fld id="{2425905D-C0C4-D040-B3F5-79CCA23FA4EB}" type="datetimeFigureOut">
               <a:rPr lang="en-US" smtClean="0"/>
-              <a:t>2/18/2025</a:t>
+              <a:t>3/18/2025</a:t>
             </a:fld>
             <a:endParaRPr lang="en-US"/>
           </a:p>
@@ -1346,7 +1393,7 @@
           <a:p>
             <a:fld id="{2425905D-C0C4-D040-B3F5-79CCA23FA4EB}" type="datetimeFigureOut">
               <a:rPr lang="en-US" smtClean="0"/>
-              <a:t>2/18/2025</a:t>
+              <a:t>3/18/2025</a:t>
             </a:fld>
             <a:endParaRPr lang="en-US"/>
           </a:p>
@@ -1546,7 +1593,7 @@
           <a:p>
             <a:fld id="{2425905D-C0C4-D040-B3F5-79CCA23FA4EB}" type="datetimeFigureOut">
               <a:rPr lang="en-US" smtClean="0"/>
-              <a:t>2/18/2025</a:t>
+              <a:t>3/18/2025</a:t>
             </a:fld>
             <a:endParaRPr lang="en-US"/>
           </a:p>
@@ -1822,7 +1869,7 @@
           <a:p>
             <a:fld id="{2425905D-C0C4-D040-B3F5-79CCA23FA4EB}" type="datetimeFigureOut">
               <a:rPr lang="en-US" smtClean="0"/>
-              <a:t>2/18/2025</a:t>
+              <a:t>3/18/2025</a:t>
             </a:fld>
             <a:endParaRPr lang="en-US"/>
           </a:p>
@@ -2090,7 +2137,7 @@
           <a:p>
             <a:fld id="{2425905D-C0C4-D040-B3F5-79CCA23FA4EB}" type="datetimeFigureOut">
               <a:rPr lang="en-US" smtClean="0"/>
-              <a:t>2/18/2025</a:t>
+              <a:t>3/18/2025</a:t>
             </a:fld>
             <a:endParaRPr lang="en-US"/>
           </a:p>
@@ -2505,7 +2552,7 @@
           <a:p>
             <a:fld id="{2425905D-C0C4-D040-B3F5-79CCA23FA4EB}" type="datetimeFigureOut">
               <a:rPr lang="en-US" smtClean="0"/>
-              <a:t>2/18/2025</a:t>
+              <a:t>3/18/2025</a:t>
             </a:fld>
             <a:endParaRPr lang="en-US"/>
           </a:p>
@@ -2647,7 +2694,7 @@
           <a:p>
             <a:fld id="{2425905D-C0C4-D040-B3F5-79CCA23FA4EB}" type="datetimeFigureOut">
               <a:rPr lang="en-US" smtClean="0"/>
-              <a:t>2/18/2025</a:t>
+              <a:t>3/18/2025</a:t>
             </a:fld>
             <a:endParaRPr lang="en-US"/>
           </a:p>
@@ -2760,7 +2807,7 @@
           <a:p>
             <a:fld id="{2425905D-C0C4-D040-B3F5-79CCA23FA4EB}" type="datetimeFigureOut">
               <a:rPr lang="en-US" smtClean="0"/>
-              <a:t>2/18/2025</a:t>
+              <a:t>3/18/2025</a:t>
             </a:fld>
             <a:endParaRPr lang="en-US"/>
           </a:p>
@@ -3073,7 +3120,7 @@
           <a:p>
             <a:fld id="{2425905D-C0C4-D040-B3F5-79CCA23FA4EB}" type="datetimeFigureOut">
               <a:rPr lang="en-US" smtClean="0"/>
-              <a:t>2/18/2025</a:t>
+              <a:t>3/18/2025</a:t>
             </a:fld>
             <a:endParaRPr lang="en-US"/>
           </a:p>
@@ -3362,7 +3409,7 @@
           <a:p>
             <a:fld id="{2425905D-C0C4-D040-B3F5-79CCA23FA4EB}" type="datetimeFigureOut">
               <a:rPr lang="en-US" smtClean="0"/>
-              <a:t>2/18/2025</a:t>
+              <a:t>3/18/2025</a:t>
             </a:fld>
             <a:endParaRPr lang="en-US"/>
           </a:p>
@@ -3605,7 +3652,7 @@
           <a:p>
             <a:fld id="{2425905D-C0C4-D040-B3F5-79CCA23FA4EB}" type="datetimeFigureOut">
               <a:rPr lang="en-US" smtClean="0"/>
-              <a:t>2/18/2025</a:t>
+              <a:t>3/18/2025</a:t>
             </a:fld>
             <a:endParaRPr lang="en-US"/>
           </a:p>
@@ -6217,6 +6264,83 @@
           </a:p>
         </p:txBody>
       </p:sp>
+      <p:pic>
+        <p:nvPicPr>
+          <p:cNvPr id="1026" name="Picture 2" descr="undefined">
+            <a:extLst>
+              <a:ext uri="{FF2B5EF4-FFF2-40B4-BE49-F238E27FC236}">
+                <a16:creationId xmlns:a16="http://schemas.microsoft.com/office/drawing/2014/main" id="{4FF6D860-7D67-912E-563A-BDF1D4054485}"/>
+              </a:ext>
+            </a:extLst>
+          </p:cNvPr>
+          <p:cNvPicPr>
+            <a:picLocks noChangeAspect="1" noChangeArrowheads="1"/>
+          </p:cNvPicPr>
+          <p:nvPr/>
+        </p:nvPicPr>
+        <p:blipFill>
+          <a:blip r:embed="rId2">
+            <a:extLst>
+              <a:ext uri="{28A0092B-C50C-407E-A947-70E740481C1C}">
+                <a14:useLocalDpi xmlns:a14="http://schemas.microsoft.com/office/drawing/2010/main" val="0"/>
+              </a:ext>
+            </a:extLst>
+          </a:blip>
+          <a:srcRect/>
+          <a:stretch>
+            <a:fillRect/>
+          </a:stretch>
+        </p:blipFill>
+        <p:spPr bwMode="auto">
+          <a:xfrm>
+            <a:off x="6595872" y="4579687"/>
+            <a:ext cx="4757928" cy="2173283"/>
+          </a:xfrm>
+          <a:prstGeom prst="rect">
+            <a:avLst/>
+          </a:prstGeom>
+          <a:noFill/>
+          <a:extLst>
+            <a:ext uri="{909E8E84-426E-40DD-AFC4-6F175D3DCCD1}">
+              <a14:hiddenFill xmlns:a14="http://schemas.microsoft.com/office/drawing/2010/main">
+                <a:solidFill>
+                  <a:srgbClr val="FFFFFF"/>
+                </a:solidFill>
+              </a14:hiddenFill>
+            </a:ext>
+          </a:extLst>
+        </p:spPr>
+      </p:pic>
+      <p:pic>
+        <p:nvPicPr>
+          <p:cNvPr id="6" name="Picture 5">
+            <a:extLst>
+              <a:ext uri="{FF2B5EF4-FFF2-40B4-BE49-F238E27FC236}">
+                <a16:creationId xmlns:a16="http://schemas.microsoft.com/office/drawing/2014/main" id="{253C3C66-D225-D617-4457-222DEBBBAEF1}"/>
+              </a:ext>
+            </a:extLst>
+          </p:cNvPr>
+          <p:cNvPicPr>
+            <a:picLocks noChangeAspect="1"/>
+          </p:cNvPicPr>
+          <p:nvPr/>
+        </p:nvPicPr>
+        <p:blipFill>
+          <a:blip r:embed="rId3"/>
+          <a:stretch>
+            <a:fillRect/>
+          </a:stretch>
+        </p:blipFill>
+        <p:spPr>
+          <a:xfrm>
+            <a:off x="658368" y="4603960"/>
+            <a:ext cx="5354333" cy="2124735"/>
+          </a:xfrm>
+          <a:prstGeom prst="rect">
+            <a:avLst/>
+          </a:prstGeom>
+        </p:spPr>
+      </p:pic>
     </p:spTree>
     <p:extLst>
       <p:ext uri="{BB962C8B-B14F-4D97-AF65-F5344CB8AC3E}">
@@ -17496,7 +17620,7 @@
             <a:pPr algn="ctr"/>
             <a:r>
               <a:rPr kumimoji="1" lang="en-US" altLang="zh-CN" dirty="0"/>
-              <a:t>1000B</a:t>
+              <a:t>68B</a:t>
             </a:r>
             <a:endParaRPr kumimoji="1" lang="zh-CN" altLang="en-US" dirty="0"/>
           </a:p>
